--- a/excel_ai/CPAT-AI_Overview_v1.0.0.pptx
+++ b/excel_ai/CPAT-AI_Overview_v1.0.0.pptx
@@ -7622,7 +7622,7 @@
                   <a:srgbClr val="FFFFFF"/>
                 </a:solidFill>
               </a:rPr>
-              <a:t>227 legacy bugs found</a:t>
+              <a:t>228 legacy bugs found</a:t>
             </a:r>
             <a:endParaRPr lang="en-US" sz="1300" dirty="0"/>
           </a:p>
@@ -11403,7 +11403,7 @@
                 <a:ea typeface="Cambria" pitchFamily="34" charset="-122"/>
                 <a:cs typeface="Cambria" pitchFamily="34" charset="-120"/>
               </a:rPr>
-              <a:t>227</a:t>
+              <a:t>228</a:t>
             </a:r>
             <a:endParaRPr lang="en-US" sz="4000" dirty="0"/>
           </a:p>
@@ -13898,7 +13898,7 @@
                 <a:ea typeface="Cambria" pitchFamily="34" charset="-122"/>
                 <a:cs typeface="Cambria" pitchFamily="34" charset="-120"/>
               </a:rPr>
-              <a:t>227</a:t>
+              <a:t>228</a:t>
             </a:r>
             <a:endParaRPr lang="en-US" sz="4000" dirty="0"/>
           </a:p>
@@ -13912,7 +13912,7 @@
                   <a:srgbClr val="5C667A"/>
                 </a:solidFill>
               </a:rPr>
-              <a:t>legacy bugs found (196 mitigation, 31 distribution), none replicated</a:t>
+              <a:t>legacy bugs found (197 mitigation, 31 distribution), none replicated</a:t>
             </a:r>
             <a:endParaRPr lang="en-US" sz="4000" dirty="0"/>
           </a:p>
@@ -15373,7 +15373,7 @@
                 <a:ea typeface="Cambria" pitchFamily="34" charset="-122"/>
                 <a:cs typeface="Cambria" pitchFamily="34" charset="-120"/>
               </a:rPr>
-              <a:t>227 bugs found in legacy CPAT; 24 of high priority</a:t>
+              <a:t>228 bugs found in legacy CPAT; 24 of high priority</a:t>
             </a:r>
             <a:endParaRPr lang="en-US" sz="3000" dirty="0"/>
           </a:p>
@@ -16734,7 +16734,7 @@
                 <a:ea typeface="Cambria" pitchFamily="34" charset="-122"/>
                 <a:cs typeface="Cambria" pitchFamily="34" charset="-120"/>
               </a:rPr>
-              <a:t>110 + 31</a:t>
+              <a:t>111 + 31</a:t>
             </a:r>
             <a:endParaRPr lang="en-US" sz="4000" dirty="0"/>
           </a:p>
@@ -16784,7 +16784,7 @@
                   <a:srgbClr val="5C667A"/>
                 </a:solidFill>
               </a:rPr>
-              <a:t>196 mitigation and 31 distribution bugs, all fixed in the prototype; also 135 legacy issues (126 mitigation, 9 distribution), replicated and tracked. Fix plans: Legacy_CPAT_Bugs_v1.0.0.docx. Legacy CPAT 1.0pre_465: the CPAT team marked 63 fixed (52 confirmed, 9 with caveats, 2 not fixed).</a:t>
+              <a:t>197 mitigation and 31 distribution bugs, all fixed in the prototype; also 135 legacy issues (126 mitigation, 9 distribution), replicated and tracked. Fix plans: Legacy_CPAT_Bugs_v1.0.0.docx. Legacy CPAT 1.0pre_465: the CPAT team marked 63 fixed (52 confirmed, 9 with caveats, 2 not fixed).</a:t>
             </a:r>
             <a:endParaRPr lang="en-US" sz="1200" dirty="0"/>
           </a:p>
